--- a/Bản sao của Báo cáo đồ án_animated  -  Repaired.pptx
+++ b/Bản sao của Báo cáo đồ án_animated  -  Repaired.pptx
@@ -47102,7 +47102,7 @@
                 <a:cs typeface="Roboto Slab"/>
                 <a:sym typeface="Roboto Slab"/>
               </a:rPr>
-              <a:t>Citation Accuracy: 56,7%</a:t>
+              <a:t>Citation Accuracy: 86,7%</a:t>
             </a:r>
           </a:p>
           <a:p>
@@ -47123,7 +47123,7 @@
                 <a:cs typeface="Roboto Slab"/>
                 <a:sym typeface="Roboto Slab"/>
               </a:rPr>
-              <a:t>Answer Quality: 3,67/5,0</a:t>
+              <a:t>Answer Quality: 4,07/5,0</a:t>
             </a:r>
           </a:p>
           <a:p>
@@ -47144,7 +47144,7 @@
                 <a:cs typeface="Roboto Slab"/>
                 <a:sym typeface="Roboto Slab"/>
               </a:rPr>
-              <a:t>Latency P50: 65,5 </a:t>
+              <a:t>Latency P50: 65,16 </a:t>
             </a:r>
             <a:r>
               <a:rPr lang="en-US" sz="2799" dirty="0" err="1">
@@ -47186,7 +47186,7 @@
                 <a:cs typeface="Roboto Slab"/>
                 <a:sym typeface="Roboto Slab"/>
               </a:rPr>
-              <a:t>Latency P95: 100,6 </a:t>
+              <a:t>Latency P95: 96,46 </a:t>
             </a:r>
             <a:r>
               <a:rPr lang="en-US" sz="2799" dirty="0" err="1">
@@ -47282,16 +47282,268 @@
               <a:buChar char="•"/>
             </a:pPr>
             <a:r>
-              <a:rPr lang="en-US" sz="2799">
-                <a:solidFill>
-                  <a:srgbClr val="0C1D4B"/>
-                </a:solidFill>
-                <a:latin typeface="Roboto Slab"/>
-                <a:ea typeface="Roboto Slab"/>
-                <a:cs typeface="Roboto Slab"/>
-                <a:sym typeface="Roboto Slab"/>
-              </a:rPr>
-              <a:t>Hệ thống đạt độ chính xác tốt ở nhóm câu hỏi factual</a:t>
+              <a:rPr lang="en-US" sz="2799" dirty="0" err="1">
+                <a:solidFill>
+                  <a:srgbClr val="0C1D4B"/>
+                </a:solidFill>
+                <a:latin typeface="Roboto Slab"/>
+                <a:ea typeface="Roboto Slab"/>
+                <a:cs typeface="Roboto Slab"/>
+                <a:sym typeface="Roboto Slab"/>
+              </a:rPr>
+              <a:t>Hệ</a:t>
+            </a:r>
+            <a:r>
+              <a:rPr lang="en-US" sz="2799" dirty="0">
+                <a:solidFill>
+                  <a:srgbClr val="0C1D4B"/>
+                </a:solidFill>
+                <a:latin typeface="Roboto Slab"/>
+                <a:ea typeface="Roboto Slab"/>
+                <a:cs typeface="Roboto Slab"/>
+                <a:sym typeface="Roboto Slab"/>
+              </a:rPr>
+              <a:t> </a:t>
+            </a:r>
+            <a:r>
+              <a:rPr lang="en-US" sz="2799" dirty="0" err="1">
+                <a:solidFill>
+                  <a:srgbClr val="0C1D4B"/>
+                </a:solidFill>
+                <a:latin typeface="Roboto Slab"/>
+                <a:ea typeface="Roboto Slab"/>
+                <a:cs typeface="Roboto Slab"/>
+                <a:sym typeface="Roboto Slab"/>
+              </a:rPr>
+              <a:t>thống</a:t>
+            </a:r>
+            <a:r>
+              <a:rPr lang="en-US" sz="2799" dirty="0">
+                <a:solidFill>
+                  <a:srgbClr val="0C1D4B"/>
+                </a:solidFill>
+                <a:latin typeface="Roboto Slab"/>
+                <a:ea typeface="Roboto Slab"/>
+                <a:cs typeface="Roboto Slab"/>
+                <a:sym typeface="Roboto Slab"/>
+              </a:rPr>
+              <a:t> </a:t>
+            </a:r>
+            <a:r>
+              <a:rPr lang="en-US" sz="2799" dirty="0" err="1">
+                <a:solidFill>
+                  <a:srgbClr val="0C1D4B"/>
+                </a:solidFill>
+                <a:latin typeface="Roboto Slab"/>
+                <a:ea typeface="Roboto Slab"/>
+                <a:cs typeface="Roboto Slab"/>
+                <a:sym typeface="Roboto Slab"/>
+              </a:rPr>
+              <a:t>đạt</a:t>
+            </a:r>
+            <a:r>
+              <a:rPr lang="en-US" sz="2799" dirty="0">
+                <a:solidFill>
+                  <a:srgbClr val="0C1D4B"/>
+                </a:solidFill>
+                <a:latin typeface="Roboto Slab"/>
+                <a:ea typeface="Roboto Slab"/>
+                <a:cs typeface="Roboto Slab"/>
+                <a:sym typeface="Roboto Slab"/>
+              </a:rPr>
+              <a:t> </a:t>
+            </a:r>
+            <a:r>
+              <a:rPr lang="en-US" sz="2799" dirty="0" err="1">
+                <a:solidFill>
+                  <a:srgbClr val="0C1D4B"/>
+                </a:solidFill>
+                <a:latin typeface="Roboto Slab"/>
+                <a:ea typeface="Roboto Slab"/>
+                <a:cs typeface="Roboto Slab"/>
+                <a:sym typeface="Roboto Slab"/>
+              </a:rPr>
+              <a:t>độ</a:t>
+            </a:r>
+            <a:r>
+              <a:rPr lang="en-US" sz="2799" dirty="0">
+                <a:solidFill>
+                  <a:srgbClr val="0C1D4B"/>
+                </a:solidFill>
+                <a:latin typeface="Roboto Slab"/>
+                <a:ea typeface="Roboto Slab"/>
+                <a:cs typeface="Roboto Slab"/>
+                <a:sym typeface="Roboto Slab"/>
+              </a:rPr>
+              <a:t> </a:t>
+            </a:r>
+            <a:r>
+              <a:rPr lang="en-US" sz="2799" dirty="0" err="1">
+                <a:solidFill>
+                  <a:srgbClr val="0C1D4B"/>
+                </a:solidFill>
+                <a:latin typeface="Roboto Slab"/>
+                <a:ea typeface="Roboto Slab"/>
+                <a:cs typeface="Roboto Slab"/>
+                <a:sym typeface="Roboto Slab"/>
+              </a:rPr>
+              <a:t>chính</a:t>
+            </a:r>
+            <a:r>
+              <a:rPr lang="en-US" sz="2799" dirty="0">
+                <a:solidFill>
+                  <a:srgbClr val="0C1D4B"/>
+                </a:solidFill>
+                <a:latin typeface="Roboto Slab"/>
+                <a:ea typeface="Roboto Slab"/>
+                <a:cs typeface="Roboto Slab"/>
+                <a:sym typeface="Roboto Slab"/>
+              </a:rPr>
+              <a:t> </a:t>
+            </a:r>
+            <a:r>
+              <a:rPr lang="en-US" sz="2799" dirty="0" err="1">
+                <a:solidFill>
+                  <a:srgbClr val="0C1D4B"/>
+                </a:solidFill>
+                <a:latin typeface="Roboto Slab"/>
+                <a:ea typeface="Roboto Slab"/>
+                <a:cs typeface="Roboto Slab"/>
+                <a:sym typeface="Roboto Slab"/>
+              </a:rPr>
+              <a:t>xác</a:t>
+            </a:r>
+            <a:r>
+              <a:rPr lang="en-US" sz="2799" dirty="0">
+                <a:solidFill>
+                  <a:srgbClr val="0C1D4B"/>
+                </a:solidFill>
+                <a:latin typeface="Roboto Slab"/>
+                <a:ea typeface="Roboto Slab"/>
+                <a:cs typeface="Roboto Slab"/>
+                <a:sym typeface="Roboto Slab"/>
+              </a:rPr>
+              <a:t> </a:t>
+            </a:r>
+            <a:r>
+              <a:rPr lang="en-US" sz="2799" dirty="0" err="1">
+                <a:solidFill>
+                  <a:srgbClr val="0C1D4B"/>
+                </a:solidFill>
+                <a:latin typeface="Roboto Slab"/>
+                <a:ea typeface="Roboto Slab"/>
+                <a:cs typeface="Roboto Slab"/>
+                <a:sym typeface="Roboto Slab"/>
+              </a:rPr>
+              <a:t>tốt</a:t>
+            </a:r>
+            <a:r>
+              <a:rPr lang="en-US" sz="2799" dirty="0">
+                <a:solidFill>
+                  <a:srgbClr val="0C1D4B"/>
+                </a:solidFill>
+                <a:latin typeface="Roboto Slab"/>
+                <a:ea typeface="Roboto Slab"/>
+                <a:cs typeface="Roboto Slab"/>
+                <a:sym typeface="Roboto Slab"/>
+              </a:rPr>
+              <a:t> </a:t>
+            </a:r>
+            <a:r>
+              <a:rPr lang="en-US" sz="2799" dirty="0" err="1">
+                <a:solidFill>
+                  <a:srgbClr val="0C1D4B"/>
+                </a:solidFill>
+                <a:latin typeface="Roboto Slab"/>
+                <a:ea typeface="Roboto Slab"/>
+                <a:cs typeface="Roboto Slab"/>
+                <a:sym typeface="Roboto Slab"/>
+              </a:rPr>
+              <a:t>ở</a:t>
+            </a:r>
+            <a:r>
+              <a:rPr lang="en-US" sz="2799" dirty="0">
+                <a:solidFill>
+                  <a:srgbClr val="0C1D4B"/>
+                </a:solidFill>
+                <a:latin typeface="Roboto Slab"/>
+                <a:ea typeface="Roboto Slab"/>
+                <a:cs typeface="Roboto Slab"/>
+                <a:sym typeface="Roboto Slab"/>
+              </a:rPr>
+              <a:t> </a:t>
+            </a:r>
+            <a:r>
+              <a:rPr lang="en-US" sz="2799" dirty="0" err="1">
+                <a:solidFill>
+                  <a:srgbClr val="0C1D4B"/>
+                </a:solidFill>
+                <a:latin typeface="Roboto Slab"/>
+                <a:ea typeface="Roboto Slab"/>
+                <a:cs typeface="Roboto Slab"/>
+                <a:sym typeface="Roboto Slab"/>
+              </a:rPr>
+              <a:t>nhóm</a:t>
+            </a:r>
+            <a:r>
+              <a:rPr lang="en-US" sz="2799" dirty="0">
+                <a:solidFill>
+                  <a:srgbClr val="0C1D4B"/>
+                </a:solidFill>
+                <a:latin typeface="Roboto Slab"/>
+                <a:ea typeface="Roboto Slab"/>
+                <a:cs typeface="Roboto Slab"/>
+                <a:sym typeface="Roboto Slab"/>
+              </a:rPr>
+              <a:t> </a:t>
+            </a:r>
+            <a:r>
+              <a:rPr lang="en-US" sz="2799" dirty="0" err="1">
+                <a:solidFill>
+                  <a:srgbClr val="0C1D4B"/>
+                </a:solidFill>
+                <a:latin typeface="Roboto Slab"/>
+                <a:ea typeface="Roboto Slab"/>
+                <a:cs typeface="Roboto Slab"/>
+                <a:sym typeface="Roboto Slab"/>
+              </a:rPr>
+              <a:t>câu</a:t>
+            </a:r>
+            <a:r>
+              <a:rPr lang="en-US" sz="2799" dirty="0">
+                <a:solidFill>
+                  <a:srgbClr val="0C1D4B"/>
+                </a:solidFill>
+                <a:latin typeface="Roboto Slab"/>
+                <a:ea typeface="Roboto Slab"/>
+                <a:cs typeface="Roboto Slab"/>
+                <a:sym typeface="Roboto Slab"/>
+              </a:rPr>
+              <a:t> </a:t>
+            </a:r>
+            <a:r>
+              <a:rPr lang="en-US" sz="2799" dirty="0" err="1">
+                <a:solidFill>
+                  <a:srgbClr val="0C1D4B"/>
+                </a:solidFill>
+                <a:latin typeface="Roboto Slab"/>
+                <a:ea typeface="Roboto Slab"/>
+                <a:cs typeface="Roboto Slab"/>
+                <a:sym typeface="Roboto Slab"/>
+              </a:rPr>
+              <a:t>hỏi</a:t>
+            </a:r>
+            <a:r>
+              <a:rPr lang="en-US" sz="2799" dirty="0">
+                <a:solidFill>
+                  <a:srgbClr val="0C1D4B"/>
+                </a:solidFill>
+                <a:latin typeface="Roboto Slab"/>
+                <a:ea typeface="Roboto Slab"/>
+                <a:cs typeface="Roboto Slab"/>
+                <a:sym typeface="Roboto Slab"/>
+              </a:rPr>
+              <a:t> factual</a:t>
             </a:r>
           </a:p>
           <a:p>
@@ -47303,17 +47555,434 @@
               <a:buChar char="•"/>
             </a:pPr>
             <a:r>
-              <a:rPr lang="en-US" sz="2799">
-                <a:solidFill>
-                  <a:srgbClr val="0C1D4B"/>
-                </a:solidFill>
-                <a:latin typeface="Roboto Slab"/>
-                <a:ea typeface="Roboto Slab"/>
-                <a:cs typeface="Roboto Slab"/>
-                <a:sym typeface="Roboto Slab"/>
-              </a:rPr>
-              <a:t>Chất lượng câu trả lời ở mức tốt, phù hợp với tư vấn pháp luật có căn cứ</a:t>
-            </a:r>
+              <a:rPr lang="en-US" sz="2799" dirty="0" err="1">
+                <a:solidFill>
+                  <a:srgbClr val="0C1D4B"/>
+                </a:solidFill>
+                <a:latin typeface="Roboto Slab"/>
+                <a:ea typeface="Roboto Slab"/>
+                <a:cs typeface="Roboto Slab"/>
+                <a:sym typeface="Roboto Slab"/>
+              </a:rPr>
+              <a:t>Chất</a:t>
+            </a:r>
+            <a:r>
+              <a:rPr lang="en-US" sz="2799" dirty="0">
+                <a:solidFill>
+                  <a:srgbClr val="0C1D4B"/>
+                </a:solidFill>
+                <a:latin typeface="Roboto Slab"/>
+                <a:ea typeface="Roboto Slab"/>
+                <a:cs typeface="Roboto Slab"/>
+                <a:sym typeface="Roboto Slab"/>
+              </a:rPr>
+              <a:t> </a:t>
+            </a:r>
+            <a:r>
+              <a:rPr lang="en-US" sz="2799" dirty="0" err="1">
+                <a:solidFill>
+                  <a:srgbClr val="0C1D4B"/>
+                </a:solidFill>
+                <a:latin typeface="Roboto Slab"/>
+                <a:ea typeface="Roboto Slab"/>
+                <a:cs typeface="Roboto Slab"/>
+                <a:sym typeface="Roboto Slab"/>
+              </a:rPr>
+              <a:t>lượng</a:t>
+            </a:r>
+            <a:r>
+              <a:rPr lang="en-US" sz="2799" dirty="0">
+                <a:solidFill>
+                  <a:srgbClr val="0C1D4B"/>
+                </a:solidFill>
+                <a:latin typeface="Roboto Slab"/>
+                <a:ea typeface="Roboto Slab"/>
+                <a:cs typeface="Roboto Slab"/>
+                <a:sym typeface="Roboto Slab"/>
+              </a:rPr>
+              <a:t> </a:t>
+            </a:r>
+            <a:r>
+              <a:rPr lang="en-US" sz="2799" dirty="0" err="1">
+                <a:solidFill>
+                  <a:srgbClr val="0C1D4B"/>
+                </a:solidFill>
+                <a:latin typeface="Roboto Slab"/>
+                <a:ea typeface="Roboto Slab"/>
+                <a:cs typeface="Roboto Slab"/>
+                <a:sym typeface="Roboto Slab"/>
+              </a:rPr>
+              <a:t>câu</a:t>
+            </a:r>
+            <a:r>
+              <a:rPr lang="en-US" sz="2799" dirty="0">
+                <a:solidFill>
+                  <a:srgbClr val="0C1D4B"/>
+                </a:solidFill>
+                <a:latin typeface="Roboto Slab"/>
+                <a:ea typeface="Roboto Slab"/>
+                <a:cs typeface="Roboto Slab"/>
+                <a:sym typeface="Roboto Slab"/>
+              </a:rPr>
+              <a:t> </a:t>
+            </a:r>
+            <a:r>
+              <a:rPr lang="en-US" sz="2799" dirty="0" err="1">
+                <a:solidFill>
+                  <a:srgbClr val="0C1D4B"/>
+                </a:solidFill>
+                <a:latin typeface="Roboto Slab"/>
+                <a:ea typeface="Roboto Slab"/>
+                <a:cs typeface="Roboto Slab"/>
+                <a:sym typeface="Roboto Slab"/>
+              </a:rPr>
+              <a:t>trả</a:t>
+            </a:r>
+            <a:r>
+              <a:rPr lang="en-US" sz="2799" dirty="0">
+                <a:solidFill>
+                  <a:srgbClr val="0C1D4B"/>
+                </a:solidFill>
+                <a:latin typeface="Roboto Slab"/>
+                <a:ea typeface="Roboto Slab"/>
+                <a:cs typeface="Roboto Slab"/>
+                <a:sym typeface="Roboto Slab"/>
+              </a:rPr>
+              <a:t> </a:t>
+            </a:r>
+            <a:r>
+              <a:rPr lang="en-US" sz="2799" dirty="0" err="1">
+                <a:solidFill>
+                  <a:srgbClr val="0C1D4B"/>
+                </a:solidFill>
+                <a:latin typeface="Roboto Slab"/>
+                <a:ea typeface="Roboto Slab"/>
+                <a:cs typeface="Roboto Slab"/>
+                <a:sym typeface="Roboto Slab"/>
+              </a:rPr>
+              <a:t>lời</a:t>
+            </a:r>
+            <a:r>
+              <a:rPr lang="en-US" sz="2799" dirty="0">
+                <a:solidFill>
+                  <a:srgbClr val="0C1D4B"/>
+                </a:solidFill>
+                <a:latin typeface="Roboto Slab"/>
+                <a:ea typeface="Roboto Slab"/>
+                <a:cs typeface="Roboto Slab"/>
+                <a:sym typeface="Roboto Slab"/>
+              </a:rPr>
+              <a:t> </a:t>
+            </a:r>
+            <a:r>
+              <a:rPr lang="en-US" sz="2799" dirty="0" err="1">
+                <a:solidFill>
+                  <a:srgbClr val="0C1D4B"/>
+                </a:solidFill>
+                <a:latin typeface="Roboto Slab"/>
+                <a:ea typeface="Roboto Slab"/>
+                <a:cs typeface="Roboto Slab"/>
+                <a:sym typeface="Roboto Slab"/>
+              </a:rPr>
+              <a:t>ở</a:t>
+            </a:r>
+            <a:r>
+              <a:rPr lang="en-US" sz="2799" dirty="0">
+                <a:solidFill>
+                  <a:srgbClr val="0C1D4B"/>
+                </a:solidFill>
+                <a:latin typeface="Roboto Slab"/>
+                <a:ea typeface="Roboto Slab"/>
+                <a:cs typeface="Roboto Slab"/>
+                <a:sym typeface="Roboto Slab"/>
+              </a:rPr>
+              <a:t> </a:t>
+            </a:r>
+            <a:r>
+              <a:rPr lang="en-US" sz="2799" dirty="0" err="1">
+                <a:solidFill>
+                  <a:srgbClr val="0C1D4B"/>
+                </a:solidFill>
+                <a:latin typeface="Roboto Slab"/>
+                <a:ea typeface="Roboto Slab"/>
+                <a:cs typeface="Roboto Slab"/>
+                <a:sym typeface="Roboto Slab"/>
+              </a:rPr>
+              <a:t>mức</a:t>
+            </a:r>
+            <a:r>
+              <a:rPr lang="en-US" sz="2799" dirty="0">
+                <a:solidFill>
+                  <a:srgbClr val="0C1D4B"/>
+                </a:solidFill>
+                <a:latin typeface="Roboto Slab"/>
+                <a:ea typeface="Roboto Slab"/>
+                <a:cs typeface="Roboto Slab"/>
+                <a:sym typeface="Roboto Slab"/>
+              </a:rPr>
+              <a:t> </a:t>
+            </a:r>
+            <a:r>
+              <a:rPr lang="en-US" sz="2799" dirty="0" err="1">
+                <a:solidFill>
+                  <a:srgbClr val="0C1D4B"/>
+                </a:solidFill>
+                <a:latin typeface="Roboto Slab"/>
+                <a:ea typeface="Roboto Slab"/>
+                <a:cs typeface="Roboto Slab"/>
+                <a:sym typeface="Roboto Slab"/>
+              </a:rPr>
+              <a:t>tốt</a:t>
+            </a:r>
+            <a:r>
+              <a:rPr lang="en-US" sz="2799" dirty="0">
+                <a:solidFill>
+                  <a:srgbClr val="0C1D4B"/>
+                </a:solidFill>
+                <a:latin typeface="Roboto Slab"/>
+                <a:ea typeface="Roboto Slab"/>
+                <a:cs typeface="Roboto Slab"/>
+                <a:sym typeface="Roboto Slab"/>
+              </a:rPr>
+              <a:t>, </a:t>
+            </a:r>
+            <a:r>
+              <a:rPr lang="en-US" sz="2799" dirty="0" err="1">
+                <a:solidFill>
+                  <a:srgbClr val="0C1D4B"/>
+                </a:solidFill>
+                <a:latin typeface="Roboto Slab"/>
+                <a:ea typeface="Roboto Slab"/>
+                <a:cs typeface="Roboto Slab"/>
+                <a:sym typeface="Roboto Slab"/>
+              </a:rPr>
+              <a:t>phù</a:t>
+            </a:r>
+            <a:r>
+              <a:rPr lang="en-US" sz="2799" dirty="0">
+                <a:solidFill>
+                  <a:srgbClr val="0C1D4B"/>
+                </a:solidFill>
+                <a:latin typeface="Roboto Slab"/>
+                <a:ea typeface="Roboto Slab"/>
+                <a:cs typeface="Roboto Slab"/>
+                <a:sym typeface="Roboto Slab"/>
+              </a:rPr>
+              <a:t> </a:t>
+            </a:r>
+            <a:r>
+              <a:rPr lang="en-US" sz="2799" dirty="0" err="1">
+                <a:solidFill>
+                  <a:srgbClr val="0C1D4B"/>
+                </a:solidFill>
+                <a:latin typeface="Roboto Slab"/>
+                <a:ea typeface="Roboto Slab"/>
+                <a:cs typeface="Roboto Slab"/>
+                <a:sym typeface="Roboto Slab"/>
+              </a:rPr>
+              <a:t>hợp</a:t>
+            </a:r>
+            <a:r>
+              <a:rPr lang="en-US" sz="2799" dirty="0">
+                <a:solidFill>
+                  <a:srgbClr val="0C1D4B"/>
+                </a:solidFill>
+                <a:latin typeface="Roboto Slab"/>
+                <a:ea typeface="Roboto Slab"/>
+                <a:cs typeface="Roboto Slab"/>
+                <a:sym typeface="Roboto Slab"/>
+              </a:rPr>
+              <a:t> </a:t>
+            </a:r>
+            <a:r>
+              <a:rPr lang="en-US" sz="2799" dirty="0" err="1">
+                <a:solidFill>
+                  <a:srgbClr val="0C1D4B"/>
+                </a:solidFill>
+                <a:latin typeface="Roboto Slab"/>
+                <a:ea typeface="Roboto Slab"/>
+                <a:cs typeface="Roboto Slab"/>
+                <a:sym typeface="Roboto Slab"/>
+              </a:rPr>
+              <a:t>với</a:t>
+            </a:r>
+            <a:r>
+              <a:rPr lang="en-US" sz="2799" dirty="0">
+                <a:solidFill>
+                  <a:srgbClr val="0C1D4B"/>
+                </a:solidFill>
+                <a:latin typeface="Roboto Slab"/>
+                <a:ea typeface="Roboto Slab"/>
+                <a:cs typeface="Roboto Slab"/>
+                <a:sym typeface="Roboto Slab"/>
+              </a:rPr>
+              <a:t> </a:t>
+            </a:r>
+            <a:r>
+              <a:rPr lang="en-US" sz="2799" dirty="0" err="1">
+                <a:solidFill>
+                  <a:srgbClr val="0C1D4B"/>
+                </a:solidFill>
+                <a:latin typeface="Roboto Slab"/>
+                <a:ea typeface="Roboto Slab"/>
+                <a:cs typeface="Roboto Slab"/>
+                <a:sym typeface="Roboto Slab"/>
+              </a:rPr>
+              <a:t>tư</a:t>
+            </a:r>
+            <a:r>
+              <a:rPr lang="en-US" sz="2799" dirty="0">
+                <a:solidFill>
+                  <a:srgbClr val="0C1D4B"/>
+                </a:solidFill>
+                <a:latin typeface="Roboto Slab"/>
+                <a:ea typeface="Roboto Slab"/>
+                <a:cs typeface="Roboto Slab"/>
+                <a:sym typeface="Roboto Slab"/>
+              </a:rPr>
+              <a:t> </a:t>
+            </a:r>
+            <a:r>
+              <a:rPr lang="en-US" sz="2799" dirty="0" err="1">
+                <a:solidFill>
+                  <a:srgbClr val="0C1D4B"/>
+                </a:solidFill>
+                <a:latin typeface="Roboto Slab"/>
+                <a:ea typeface="Roboto Slab"/>
+                <a:cs typeface="Roboto Slab"/>
+                <a:sym typeface="Roboto Slab"/>
+              </a:rPr>
+              <a:t>vấn</a:t>
+            </a:r>
+            <a:r>
+              <a:rPr lang="en-US" sz="2799" dirty="0">
+                <a:solidFill>
+                  <a:srgbClr val="0C1D4B"/>
+                </a:solidFill>
+                <a:latin typeface="Roboto Slab"/>
+                <a:ea typeface="Roboto Slab"/>
+                <a:cs typeface="Roboto Slab"/>
+                <a:sym typeface="Roboto Slab"/>
+              </a:rPr>
+              <a:t> </a:t>
+            </a:r>
+            <a:r>
+              <a:rPr lang="en-US" sz="2799" dirty="0" err="1">
+                <a:solidFill>
+                  <a:srgbClr val="0C1D4B"/>
+                </a:solidFill>
+                <a:latin typeface="Roboto Slab"/>
+                <a:ea typeface="Roboto Slab"/>
+                <a:cs typeface="Roboto Slab"/>
+                <a:sym typeface="Roboto Slab"/>
+              </a:rPr>
+              <a:t>pháp</a:t>
+            </a:r>
+            <a:r>
+              <a:rPr lang="en-US" sz="2799" dirty="0">
+                <a:solidFill>
+                  <a:srgbClr val="0C1D4B"/>
+                </a:solidFill>
+                <a:latin typeface="Roboto Slab"/>
+                <a:ea typeface="Roboto Slab"/>
+                <a:cs typeface="Roboto Slab"/>
+                <a:sym typeface="Roboto Slab"/>
+              </a:rPr>
+              <a:t> </a:t>
+            </a:r>
+            <a:r>
+              <a:rPr lang="en-US" sz="2799" dirty="0" err="1">
+                <a:solidFill>
+                  <a:srgbClr val="0C1D4B"/>
+                </a:solidFill>
+                <a:latin typeface="Roboto Slab"/>
+                <a:ea typeface="Roboto Slab"/>
+                <a:cs typeface="Roboto Slab"/>
+                <a:sym typeface="Roboto Slab"/>
+              </a:rPr>
+              <a:t>luật</a:t>
+            </a:r>
+            <a:r>
+              <a:rPr lang="en-US" sz="2799" dirty="0">
+                <a:solidFill>
+                  <a:srgbClr val="0C1D4B"/>
+                </a:solidFill>
+                <a:latin typeface="Roboto Slab"/>
+                <a:ea typeface="Roboto Slab"/>
+                <a:cs typeface="Roboto Slab"/>
+                <a:sym typeface="Roboto Slab"/>
+              </a:rPr>
+              <a:t> </a:t>
+            </a:r>
+            <a:r>
+              <a:rPr lang="en-US" sz="2799" dirty="0" err="1">
+                <a:solidFill>
+                  <a:srgbClr val="0C1D4B"/>
+                </a:solidFill>
+                <a:latin typeface="Roboto Slab"/>
+                <a:ea typeface="Roboto Slab"/>
+                <a:cs typeface="Roboto Slab"/>
+                <a:sym typeface="Roboto Slab"/>
+              </a:rPr>
+              <a:t>có</a:t>
+            </a:r>
+            <a:r>
+              <a:rPr lang="en-US" sz="2799" dirty="0">
+                <a:solidFill>
+                  <a:srgbClr val="0C1D4B"/>
+                </a:solidFill>
+                <a:latin typeface="Roboto Slab"/>
+                <a:ea typeface="Roboto Slab"/>
+                <a:cs typeface="Roboto Slab"/>
+                <a:sym typeface="Roboto Slab"/>
+              </a:rPr>
+              <a:t> </a:t>
+            </a:r>
+            <a:r>
+              <a:rPr lang="en-US" sz="2799" dirty="0" err="1">
+                <a:solidFill>
+                  <a:srgbClr val="0C1D4B"/>
+                </a:solidFill>
+                <a:latin typeface="Roboto Slab"/>
+                <a:ea typeface="Roboto Slab"/>
+                <a:cs typeface="Roboto Slab"/>
+                <a:sym typeface="Roboto Slab"/>
+              </a:rPr>
+              <a:t>căn</a:t>
+            </a:r>
+            <a:r>
+              <a:rPr lang="en-US" sz="2799" dirty="0">
+                <a:solidFill>
+                  <a:srgbClr val="0C1D4B"/>
+                </a:solidFill>
+                <a:latin typeface="Roboto Slab"/>
+                <a:ea typeface="Roboto Slab"/>
+                <a:cs typeface="Roboto Slab"/>
+                <a:sym typeface="Roboto Slab"/>
+              </a:rPr>
+              <a:t> </a:t>
+            </a:r>
+            <a:r>
+              <a:rPr lang="en-US" sz="2799" dirty="0" err="1">
+                <a:solidFill>
+                  <a:srgbClr val="0C1D4B"/>
+                </a:solidFill>
+                <a:latin typeface="Roboto Slab"/>
+                <a:ea typeface="Roboto Slab"/>
+                <a:cs typeface="Roboto Slab"/>
+                <a:sym typeface="Roboto Slab"/>
+              </a:rPr>
+              <a:t>cứ</a:t>
+            </a:r>
+            <a:endParaRPr lang="en-US" sz="2799" dirty="0">
+              <a:solidFill>
+                <a:srgbClr val="0C1D4B"/>
+              </a:solidFill>
+              <a:latin typeface="Roboto Slab"/>
+              <a:ea typeface="Roboto Slab"/>
+              <a:cs typeface="Roboto Slab"/>
+              <a:sym typeface="Roboto Slab"/>
+            </a:endParaRPr>
           </a:p>
           <a:p>
             <a:pPr marL="604519" lvl="1" indent="-302260" algn="l">
@@ -47324,17 +47993,218 @@
               <a:buChar char="•"/>
             </a:pPr>
             <a:r>
-              <a:rPr lang="en-US" sz="2799">
-                <a:solidFill>
-                  <a:srgbClr val="0C1D4B"/>
-                </a:solidFill>
-                <a:latin typeface="Roboto Slab"/>
-                <a:ea typeface="Roboto Slab"/>
-                <a:cs typeface="Roboto Slab"/>
-                <a:sym typeface="Roboto Slab"/>
-              </a:rPr>
-              <a:t>Hạn chế chính nằm ở thời gian phản hồi</a:t>
-            </a:r>
+              <a:rPr lang="en-US" sz="2799" dirty="0" err="1">
+                <a:solidFill>
+                  <a:srgbClr val="0C1D4B"/>
+                </a:solidFill>
+                <a:latin typeface="Roboto Slab"/>
+                <a:ea typeface="Roboto Slab"/>
+                <a:cs typeface="Roboto Slab"/>
+                <a:sym typeface="Roboto Slab"/>
+              </a:rPr>
+              <a:t>Hạn</a:t>
+            </a:r>
+            <a:r>
+              <a:rPr lang="en-US" sz="2799" dirty="0">
+                <a:solidFill>
+                  <a:srgbClr val="0C1D4B"/>
+                </a:solidFill>
+                <a:latin typeface="Roboto Slab"/>
+                <a:ea typeface="Roboto Slab"/>
+                <a:cs typeface="Roboto Slab"/>
+                <a:sym typeface="Roboto Slab"/>
+              </a:rPr>
+              <a:t> </a:t>
+            </a:r>
+            <a:r>
+              <a:rPr lang="en-US" sz="2799" dirty="0" err="1">
+                <a:solidFill>
+                  <a:srgbClr val="0C1D4B"/>
+                </a:solidFill>
+                <a:latin typeface="Roboto Slab"/>
+                <a:ea typeface="Roboto Slab"/>
+                <a:cs typeface="Roboto Slab"/>
+                <a:sym typeface="Roboto Slab"/>
+              </a:rPr>
+              <a:t>chế</a:t>
+            </a:r>
+            <a:r>
+              <a:rPr lang="en-US" sz="2799" dirty="0">
+                <a:solidFill>
+                  <a:srgbClr val="0C1D4B"/>
+                </a:solidFill>
+                <a:latin typeface="Roboto Slab"/>
+                <a:ea typeface="Roboto Slab"/>
+                <a:cs typeface="Roboto Slab"/>
+                <a:sym typeface="Roboto Slab"/>
+              </a:rPr>
+              <a:t> </a:t>
+            </a:r>
+            <a:r>
+              <a:rPr lang="en-US" sz="2799" dirty="0" err="1">
+                <a:solidFill>
+                  <a:srgbClr val="0C1D4B"/>
+                </a:solidFill>
+                <a:latin typeface="Roboto Slab"/>
+                <a:ea typeface="Roboto Slab"/>
+                <a:cs typeface="Roboto Slab"/>
+                <a:sym typeface="Roboto Slab"/>
+              </a:rPr>
+              <a:t>chính</a:t>
+            </a:r>
+            <a:r>
+              <a:rPr lang="en-US" sz="2799" dirty="0">
+                <a:solidFill>
+                  <a:srgbClr val="0C1D4B"/>
+                </a:solidFill>
+                <a:latin typeface="Roboto Slab"/>
+                <a:ea typeface="Roboto Slab"/>
+                <a:cs typeface="Roboto Slab"/>
+                <a:sym typeface="Roboto Slab"/>
+              </a:rPr>
+              <a:t> </a:t>
+            </a:r>
+            <a:r>
+              <a:rPr lang="en-US" sz="2799" dirty="0" err="1">
+                <a:solidFill>
+                  <a:srgbClr val="0C1D4B"/>
+                </a:solidFill>
+                <a:latin typeface="Roboto Slab"/>
+                <a:ea typeface="Roboto Slab"/>
+                <a:cs typeface="Roboto Slab"/>
+                <a:sym typeface="Roboto Slab"/>
+              </a:rPr>
+              <a:t>nằm</a:t>
+            </a:r>
+            <a:r>
+              <a:rPr lang="en-US" sz="2799" dirty="0">
+                <a:solidFill>
+                  <a:srgbClr val="0C1D4B"/>
+                </a:solidFill>
+                <a:latin typeface="Roboto Slab"/>
+                <a:ea typeface="Roboto Slab"/>
+                <a:cs typeface="Roboto Slab"/>
+                <a:sym typeface="Roboto Slab"/>
+              </a:rPr>
+              <a:t> </a:t>
+            </a:r>
+            <a:r>
+              <a:rPr lang="en-US" sz="2799" dirty="0" err="1">
+                <a:solidFill>
+                  <a:srgbClr val="0C1D4B"/>
+                </a:solidFill>
+                <a:latin typeface="Roboto Slab"/>
+                <a:ea typeface="Roboto Slab"/>
+                <a:cs typeface="Roboto Slab"/>
+                <a:sym typeface="Roboto Slab"/>
+              </a:rPr>
+              <a:t>ở</a:t>
+            </a:r>
+            <a:r>
+              <a:rPr lang="en-US" sz="2799" dirty="0">
+                <a:solidFill>
+                  <a:srgbClr val="0C1D4B"/>
+                </a:solidFill>
+                <a:latin typeface="Roboto Slab"/>
+                <a:ea typeface="Roboto Slab"/>
+                <a:cs typeface="Roboto Slab"/>
+                <a:sym typeface="Roboto Slab"/>
+              </a:rPr>
+              <a:t> </a:t>
+            </a:r>
+            <a:r>
+              <a:rPr lang="en-US" sz="2799" dirty="0" err="1">
+                <a:solidFill>
+                  <a:srgbClr val="0C1D4B"/>
+                </a:solidFill>
+                <a:latin typeface="Roboto Slab"/>
+                <a:ea typeface="Roboto Slab"/>
+                <a:cs typeface="Roboto Slab"/>
+                <a:sym typeface="Roboto Slab"/>
+              </a:rPr>
+              <a:t>thời</a:t>
+            </a:r>
+            <a:r>
+              <a:rPr lang="en-US" sz="2799" dirty="0">
+                <a:solidFill>
+                  <a:srgbClr val="0C1D4B"/>
+                </a:solidFill>
+                <a:latin typeface="Roboto Slab"/>
+                <a:ea typeface="Roboto Slab"/>
+                <a:cs typeface="Roboto Slab"/>
+                <a:sym typeface="Roboto Slab"/>
+              </a:rPr>
+              <a:t> </a:t>
+            </a:r>
+            <a:r>
+              <a:rPr lang="en-US" sz="2799" dirty="0" err="1">
+                <a:solidFill>
+                  <a:srgbClr val="0C1D4B"/>
+                </a:solidFill>
+                <a:latin typeface="Roboto Slab"/>
+                <a:ea typeface="Roboto Slab"/>
+                <a:cs typeface="Roboto Slab"/>
+                <a:sym typeface="Roboto Slab"/>
+              </a:rPr>
+              <a:t>gian</a:t>
+            </a:r>
+            <a:r>
+              <a:rPr lang="en-US" sz="2799" dirty="0">
+                <a:solidFill>
+                  <a:srgbClr val="0C1D4B"/>
+                </a:solidFill>
+                <a:latin typeface="Roboto Slab"/>
+                <a:ea typeface="Roboto Slab"/>
+                <a:cs typeface="Roboto Slab"/>
+                <a:sym typeface="Roboto Slab"/>
+              </a:rPr>
+              <a:t> </a:t>
+            </a:r>
+            <a:r>
+              <a:rPr lang="en-US" sz="2799" dirty="0" err="1">
+                <a:solidFill>
+                  <a:srgbClr val="0C1D4B"/>
+                </a:solidFill>
+                <a:latin typeface="Roboto Slab"/>
+                <a:ea typeface="Roboto Slab"/>
+                <a:cs typeface="Roboto Slab"/>
+                <a:sym typeface="Roboto Slab"/>
+              </a:rPr>
+              <a:t>phản</a:t>
+            </a:r>
+            <a:r>
+              <a:rPr lang="en-US" sz="2799" dirty="0">
+                <a:solidFill>
+                  <a:srgbClr val="0C1D4B"/>
+                </a:solidFill>
+                <a:latin typeface="Roboto Slab"/>
+                <a:ea typeface="Roboto Slab"/>
+                <a:cs typeface="Roboto Slab"/>
+                <a:sym typeface="Roboto Slab"/>
+              </a:rPr>
+              <a:t> </a:t>
+            </a:r>
+            <a:r>
+              <a:rPr lang="en-US" sz="2799" dirty="0" err="1">
+                <a:solidFill>
+                  <a:srgbClr val="0C1D4B"/>
+                </a:solidFill>
+                <a:latin typeface="Roboto Slab"/>
+                <a:ea typeface="Roboto Slab"/>
+                <a:cs typeface="Roboto Slab"/>
+                <a:sym typeface="Roboto Slab"/>
+              </a:rPr>
+              <a:t>hồi</a:t>
+            </a:r>
+            <a:endParaRPr lang="en-US" sz="2799" dirty="0">
+              <a:solidFill>
+                <a:srgbClr val="0C1D4B"/>
+              </a:solidFill>
+              <a:latin typeface="Roboto Slab"/>
+              <a:ea typeface="Roboto Slab"/>
+              <a:cs typeface="Roboto Slab"/>
+              <a:sym typeface="Roboto Slab"/>
+            </a:endParaRPr>
           </a:p>
         </p:txBody>
       </p:sp>
